--- a/slides/figures/imgsrc.pptx
+++ b/slides/figures/imgsrc.pptx
@@ -5,12 +5,17 @@
     <p:sldMasterId id="2147483648" r:id="rId1"/>
   </p:sldMasterIdLst>
   <p:notesMasterIdLst>
-    <p:notesMasterId r:id="rId5"/>
+    <p:notesMasterId r:id="rId10"/>
   </p:notesMasterIdLst>
   <p:sldIdLst>
     <p:sldId id="258" r:id="rId2"/>
     <p:sldId id="256" r:id="rId3"/>
     <p:sldId id="257" r:id="rId4"/>
+    <p:sldId id="259" r:id="rId5"/>
+    <p:sldId id="260" r:id="rId6"/>
+    <p:sldId id="261" r:id="rId7"/>
+    <p:sldId id="262" r:id="rId8"/>
+    <p:sldId id="263" r:id="rId9"/>
   </p:sldIdLst>
   <p:sldSz cx="12192000" cy="6858000"/>
   <p:notesSz cx="6858000" cy="9144000"/>
@@ -109,6 +114,11 @@
       </a:defRPr>
     </a:lvl9pPr>
   </p:defaultTextStyle>
+  <p:extLst>
+    <p:ext uri="{EFAFB233-063F-42B5-8137-9DF3F51BA10A}">
+      <p15:sldGuideLst xmlns:p15="http://schemas.microsoft.com/office/powerpoint/2012/main"/>
+    </p:ext>
+  </p:extLst>
 </p:presentation>
 </file>
 
@@ -194,7 +204,7 @@
           <a:p>
             <a:fld id="{CA4471EA-9DA2-44CE-9CB5-B2BCE5DA53DA}" type="datetimeFigureOut">
               <a:rPr lang="en-US" smtClean="0"/>
-              <a:t>8/25/2026</a:t>
+              <a:t>9/24/2026</a:t>
             </a:fld>
             <a:endParaRPr lang="en-US"/>
           </a:p>
@@ -779,7 +789,7 @@
           <a:p>
             <a:fld id="{82DCB186-DA9A-4076-8910-023199656396}" type="datetimeFigureOut">
               <a:rPr lang="en-US" smtClean="0"/>
-              <a:t>8/25/2026</a:t>
+              <a:t>9/24/2026</a:t>
             </a:fld>
             <a:endParaRPr lang="en-US"/>
           </a:p>
@@ -979,7 +989,7 @@
           <a:p>
             <a:fld id="{82DCB186-DA9A-4076-8910-023199656396}" type="datetimeFigureOut">
               <a:rPr lang="en-US" smtClean="0"/>
-              <a:t>8/25/2026</a:t>
+              <a:t>9/24/2026</a:t>
             </a:fld>
             <a:endParaRPr lang="en-US"/>
           </a:p>
@@ -1189,7 +1199,7 @@
           <a:p>
             <a:fld id="{82DCB186-DA9A-4076-8910-023199656396}" type="datetimeFigureOut">
               <a:rPr lang="en-US" smtClean="0"/>
-              <a:t>8/25/2026</a:t>
+              <a:t>9/24/2026</a:t>
             </a:fld>
             <a:endParaRPr lang="en-US"/>
           </a:p>
@@ -1389,7 +1399,7 @@
           <a:p>
             <a:fld id="{82DCB186-DA9A-4076-8910-023199656396}" type="datetimeFigureOut">
               <a:rPr lang="en-US" smtClean="0"/>
-              <a:t>8/25/2026</a:t>
+              <a:t>9/24/2026</a:t>
             </a:fld>
             <a:endParaRPr lang="en-US"/>
           </a:p>
@@ -1665,7 +1675,7 @@
           <a:p>
             <a:fld id="{82DCB186-DA9A-4076-8910-023199656396}" type="datetimeFigureOut">
               <a:rPr lang="en-US" smtClean="0"/>
-              <a:t>8/25/2026</a:t>
+              <a:t>9/24/2026</a:t>
             </a:fld>
             <a:endParaRPr lang="en-US"/>
           </a:p>
@@ -1933,7 +1943,7 @@
           <a:p>
             <a:fld id="{82DCB186-DA9A-4076-8910-023199656396}" type="datetimeFigureOut">
               <a:rPr lang="en-US" smtClean="0"/>
-              <a:t>8/25/2026</a:t>
+              <a:t>9/24/2026</a:t>
             </a:fld>
             <a:endParaRPr lang="en-US"/>
           </a:p>
@@ -2348,7 +2358,7 @@
           <a:p>
             <a:fld id="{82DCB186-DA9A-4076-8910-023199656396}" type="datetimeFigureOut">
               <a:rPr lang="en-US" smtClean="0"/>
-              <a:t>8/25/2026</a:t>
+              <a:t>9/24/2026</a:t>
             </a:fld>
             <a:endParaRPr lang="en-US"/>
           </a:p>
@@ -2490,7 +2500,7 @@
           <a:p>
             <a:fld id="{82DCB186-DA9A-4076-8910-023199656396}" type="datetimeFigureOut">
               <a:rPr lang="en-US" smtClean="0"/>
-              <a:t>8/25/2026</a:t>
+              <a:t>9/24/2026</a:t>
             </a:fld>
             <a:endParaRPr lang="en-US"/>
           </a:p>
@@ -2603,7 +2613,7 @@
           <a:p>
             <a:fld id="{82DCB186-DA9A-4076-8910-023199656396}" type="datetimeFigureOut">
               <a:rPr lang="en-US" smtClean="0"/>
-              <a:t>8/25/2026</a:t>
+              <a:t>9/24/2026</a:t>
             </a:fld>
             <a:endParaRPr lang="en-US"/>
           </a:p>
@@ -2916,7 +2926,7 @@
           <a:p>
             <a:fld id="{82DCB186-DA9A-4076-8910-023199656396}" type="datetimeFigureOut">
               <a:rPr lang="en-US" smtClean="0"/>
-              <a:t>8/25/2026</a:t>
+              <a:t>9/24/2026</a:t>
             </a:fld>
             <a:endParaRPr lang="en-US"/>
           </a:p>
@@ -3205,7 +3215,7 @@
           <a:p>
             <a:fld id="{82DCB186-DA9A-4076-8910-023199656396}" type="datetimeFigureOut">
               <a:rPr lang="en-US" smtClean="0"/>
-              <a:t>8/25/2026</a:t>
+              <a:t>9/24/2026</a:t>
             </a:fld>
             <a:endParaRPr lang="en-US"/>
           </a:p>
@@ -3448,7 +3458,7 @@
           <a:p>
             <a:fld id="{82DCB186-DA9A-4076-8910-023199656396}" type="datetimeFigureOut">
               <a:rPr lang="en-US" smtClean="0"/>
-              <a:t>8/25/2026</a:t>
+              <a:t>9/24/2026</a:t>
             </a:fld>
             <a:endParaRPr lang="en-US"/>
           </a:p>
@@ -4845,6 +4855,1980 @@
     <p:extLst>
       <p:ext uri="{BB962C8B-B14F-4D97-AF65-F5344CB8AC3E}">
         <p14:creationId xmlns:p14="http://schemas.microsoft.com/office/powerpoint/2010/main" val="1342637870"/>
+      </p:ext>
+    </p:extLst>
+  </p:cSld>
+  <p:clrMapOvr>
+    <a:masterClrMapping/>
+  </p:clrMapOvr>
+</p:sld>
+</file>
+
+<file path=ppt/slides/slide4.xml><?xml version="1.0" encoding="utf-8"?>
+<p:sld xmlns:a="http://schemas.openxmlformats.org/drawingml/2006/main" xmlns:r="http://schemas.openxmlformats.org/officeDocument/2006/relationships" xmlns:p="http://schemas.openxmlformats.org/presentationml/2006/main">
+  <p:cSld>
+    <p:spTree>
+      <p:nvGrpSpPr>
+        <p:cNvPr id="1" name=""/>
+        <p:cNvGrpSpPr/>
+        <p:nvPr/>
+      </p:nvGrpSpPr>
+      <p:grpSpPr>
+        <a:xfrm>
+          <a:off x="0" y="0"/>
+          <a:ext cx="0" cy="0"/>
+          <a:chOff x="0" y="0"/>
+          <a:chExt cx="0" cy="0"/>
+        </a:xfrm>
+      </p:grpSpPr>
+      <p:pic>
+        <p:nvPicPr>
+          <p:cNvPr id="7" name="Immagine 6">
+            <a:extLst>
+              <a:ext uri="{FF2B5EF4-FFF2-40B4-BE49-F238E27FC236}">
+                <a16:creationId xmlns:a16="http://schemas.microsoft.com/office/drawing/2014/main" id="{812E9739-BCC1-488D-9590-DA63614AA4B0}"/>
+              </a:ext>
+            </a:extLst>
+          </p:cNvPr>
+          <p:cNvPicPr>
+            <a:picLocks noChangeAspect="1"/>
+          </p:cNvPicPr>
+          <p:nvPr/>
+        </p:nvPicPr>
+        <p:blipFill>
+          <a:blip r:embed="rId2">
+            <a:extLst>
+              <a:ext uri="{28A0092B-C50C-407E-A947-70E740481C1C}">
+                <a14:useLocalDpi xmlns:a14="http://schemas.microsoft.com/office/drawing/2010/main" val="0"/>
+              </a:ext>
+            </a:extLst>
+          </a:blip>
+          <a:stretch>
+            <a:fillRect/>
+          </a:stretch>
+        </p:blipFill>
+        <p:spPr>
+          <a:xfrm>
+            <a:off x="1605851" y="0"/>
+            <a:ext cx="8980297" cy="6858000"/>
+          </a:xfrm>
+          <a:prstGeom prst="rect">
+            <a:avLst/>
+          </a:prstGeom>
+        </p:spPr>
+      </p:pic>
+    </p:spTree>
+    <p:extLst>
+      <p:ext uri="{BB962C8B-B14F-4D97-AF65-F5344CB8AC3E}">
+        <p14:creationId xmlns:p14="http://schemas.microsoft.com/office/powerpoint/2010/main" val="1219210374"/>
+      </p:ext>
+    </p:extLst>
+  </p:cSld>
+  <p:clrMapOvr>
+    <a:masterClrMapping/>
+  </p:clrMapOvr>
+</p:sld>
+</file>
+
+<file path=ppt/slides/slide5.xml><?xml version="1.0" encoding="utf-8"?>
+<p:sld xmlns:a="http://schemas.openxmlformats.org/drawingml/2006/main" xmlns:r="http://schemas.openxmlformats.org/officeDocument/2006/relationships" xmlns:p="http://schemas.openxmlformats.org/presentationml/2006/main">
+  <p:cSld>
+    <p:spTree>
+      <p:nvGrpSpPr>
+        <p:cNvPr id="1" name=""/>
+        <p:cNvGrpSpPr/>
+        <p:nvPr/>
+      </p:nvGrpSpPr>
+      <p:grpSpPr>
+        <a:xfrm>
+          <a:off x="0" y="0"/>
+          <a:ext cx="0" cy="0"/>
+          <a:chOff x="0" y="0"/>
+          <a:chExt cx="0" cy="0"/>
+        </a:xfrm>
+      </p:grpSpPr>
+      <p:pic>
+        <p:nvPicPr>
+          <p:cNvPr id="7" name="Immagine 6">
+            <a:extLst>
+              <a:ext uri="{FF2B5EF4-FFF2-40B4-BE49-F238E27FC236}">
+                <a16:creationId xmlns:a16="http://schemas.microsoft.com/office/drawing/2014/main" id="{812E9739-BCC1-488D-9590-DA63614AA4B0}"/>
+              </a:ext>
+            </a:extLst>
+          </p:cNvPr>
+          <p:cNvPicPr>
+            <a:picLocks noChangeAspect="1"/>
+          </p:cNvPicPr>
+          <p:nvPr/>
+        </p:nvPicPr>
+        <p:blipFill>
+          <a:blip r:embed="rId2">
+            <a:extLst>
+              <a:ext uri="{28A0092B-C50C-407E-A947-70E740481C1C}">
+                <a14:useLocalDpi xmlns:a14="http://schemas.microsoft.com/office/drawing/2010/main" val="0"/>
+              </a:ext>
+            </a:extLst>
+          </a:blip>
+          <a:stretch>
+            <a:fillRect/>
+          </a:stretch>
+        </p:blipFill>
+        <p:spPr>
+          <a:xfrm>
+            <a:off x="1605851" y="0"/>
+            <a:ext cx="8980297" cy="6858000"/>
+          </a:xfrm>
+          <a:prstGeom prst="rect">
+            <a:avLst/>
+          </a:prstGeom>
+        </p:spPr>
+      </p:pic>
+      <p:sp>
+        <p:nvSpPr>
+          <p:cNvPr id="4" name="Rettangolo 3">
+            <a:extLst>
+              <a:ext uri="{FF2B5EF4-FFF2-40B4-BE49-F238E27FC236}">
+                <a16:creationId xmlns:a16="http://schemas.microsoft.com/office/drawing/2014/main" id="{7504AD29-4A2A-41CC-89EC-38534DD92767}"/>
+              </a:ext>
+            </a:extLst>
+          </p:cNvPr>
+          <p:cNvSpPr/>
+          <p:nvPr/>
+        </p:nvSpPr>
+        <p:spPr>
+          <a:xfrm>
+            <a:off x="1447476" y="487147"/>
+            <a:ext cx="1734956" cy="1360287"/>
+          </a:xfrm>
+          <a:prstGeom prst="rect">
+            <a:avLst/>
+          </a:prstGeom>
+          <a:solidFill>
+            <a:schemeClr val="bg1"/>
+          </a:solidFill>
+          <a:ln>
+            <a:solidFill>
+              <a:schemeClr val="bg1"/>
+            </a:solidFill>
+          </a:ln>
+        </p:spPr>
+        <p:style>
+          <a:lnRef idx="2">
+            <a:schemeClr val="accent1">
+              <a:shade val="50000"/>
+            </a:schemeClr>
+          </a:lnRef>
+          <a:fillRef idx="1">
+            <a:schemeClr val="accent1"/>
+          </a:fillRef>
+          <a:effectRef idx="0">
+            <a:schemeClr val="accent1"/>
+          </a:effectRef>
+          <a:fontRef idx="minor">
+            <a:schemeClr val="lt1"/>
+          </a:fontRef>
+        </p:style>
+        <p:txBody>
+          <a:bodyPr rtlCol="0" anchor="ctr"/>
+          <a:lstStyle/>
+          <a:p>
+            <a:pPr algn="ctr"/>
+            <a:endParaRPr lang="it-IT"/>
+          </a:p>
+        </p:txBody>
+      </p:sp>
+      <p:sp>
+        <p:nvSpPr>
+          <p:cNvPr id="9" name="Rettangolo 8">
+            <a:extLst>
+              <a:ext uri="{FF2B5EF4-FFF2-40B4-BE49-F238E27FC236}">
+                <a16:creationId xmlns:a16="http://schemas.microsoft.com/office/drawing/2014/main" id="{310126B8-34B3-4467-ACC3-4865F7C61DB2}"/>
+              </a:ext>
+            </a:extLst>
+          </p:cNvPr>
+          <p:cNvSpPr/>
+          <p:nvPr/>
+        </p:nvSpPr>
+        <p:spPr>
+          <a:xfrm>
+            <a:off x="1453456" y="1817487"/>
+            <a:ext cx="2120291" cy="1113386"/>
+          </a:xfrm>
+          <a:prstGeom prst="rect">
+            <a:avLst/>
+          </a:prstGeom>
+          <a:solidFill>
+            <a:schemeClr val="bg1"/>
+          </a:solidFill>
+          <a:ln>
+            <a:solidFill>
+              <a:schemeClr val="bg1"/>
+            </a:solidFill>
+          </a:ln>
+        </p:spPr>
+        <p:style>
+          <a:lnRef idx="2">
+            <a:schemeClr val="accent1">
+              <a:shade val="50000"/>
+            </a:schemeClr>
+          </a:lnRef>
+          <a:fillRef idx="1">
+            <a:schemeClr val="accent1"/>
+          </a:fillRef>
+          <a:effectRef idx="0">
+            <a:schemeClr val="accent1"/>
+          </a:effectRef>
+          <a:fontRef idx="minor">
+            <a:schemeClr val="lt1"/>
+          </a:fontRef>
+        </p:style>
+        <p:txBody>
+          <a:bodyPr rtlCol="0" anchor="ctr"/>
+          <a:lstStyle/>
+          <a:p>
+            <a:pPr algn="ctr"/>
+            <a:endParaRPr lang="it-IT"/>
+          </a:p>
+        </p:txBody>
+      </p:sp>
+      <p:sp>
+        <p:nvSpPr>
+          <p:cNvPr id="5" name="Fumetto: rettangolo 4">
+            <a:extLst>
+              <a:ext uri="{FF2B5EF4-FFF2-40B4-BE49-F238E27FC236}">
+                <a16:creationId xmlns:a16="http://schemas.microsoft.com/office/drawing/2014/main" id="{54439E76-15F5-4AF7-8F37-37880E36A697}"/>
+              </a:ext>
+            </a:extLst>
+          </p:cNvPr>
+          <p:cNvSpPr/>
+          <p:nvPr/>
+        </p:nvSpPr>
+        <p:spPr>
+          <a:xfrm>
+            <a:off x="1447475" y="2116297"/>
+            <a:ext cx="1433491" cy="1157974"/>
+          </a:xfrm>
+          <a:prstGeom prst="wedgeRectCallout">
+            <a:avLst>
+              <a:gd name="adj1" fmla="val 22237"/>
+              <a:gd name="adj2" fmla="val 90204"/>
+            </a:avLst>
+          </a:prstGeom>
+          <a:solidFill>
+            <a:srgbClr val="FFC000"/>
+          </a:solidFill>
+          <a:ln w="9525">
+            <a:solidFill>
+              <a:schemeClr val="tx1"/>
+            </a:solidFill>
+          </a:ln>
+        </p:spPr>
+        <p:style>
+          <a:lnRef idx="2">
+            <a:schemeClr val="accent1">
+              <a:shade val="50000"/>
+            </a:schemeClr>
+          </a:lnRef>
+          <a:fillRef idx="1">
+            <a:schemeClr val="accent1"/>
+          </a:fillRef>
+          <a:effectRef idx="0">
+            <a:schemeClr val="accent1"/>
+          </a:effectRef>
+          <a:fontRef idx="minor">
+            <a:schemeClr val="lt1"/>
+          </a:fontRef>
+        </p:style>
+        <p:txBody>
+          <a:bodyPr rtlCol="0" anchor="ctr"/>
+          <a:lstStyle/>
+          <a:p>
+            <a:pPr algn="ctr"/>
+            <a:r>
+              <a:rPr lang="it-IT" dirty="0">
+                <a:solidFill>
+                  <a:schemeClr val="tx1"/>
+                </a:solidFill>
+                <a:latin typeface="Helvetica" panose="020B0604020202020204" pitchFamily="34" charset="0"/>
+                <a:cs typeface="Helvetica" panose="020B0604020202020204" pitchFamily="34" charset="0"/>
+              </a:rPr>
+              <a:t>w/ feature</a:t>
+            </a:r>
+            <a:br>
+              <a:rPr lang="it-IT" dirty="0">
+                <a:solidFill>
+                  <a:schemeClr val="tx1"/>
+                </a:solidFill>
+                <a:latin typeface="Helvetica" panose="020B0604020202020204" pitchFamily="34" charset="0"/>
+                <a:cs typeface="Helvetica" panose="020B0604020202020204" pitchFamily="34" charset="0"/>
+              </a:rPr>
+            </a:br>
+            <a:r>
+              <a:rPr lang="it-IT" dirty="0" err="1">
+                <a:solidFill>
+                  <a:schemeClr val="tx1"/>
+                </a:solidFill>
+                <a:latin typeface="Helvetica" panose="020B0604020202020204" pitchFamily="34" charset="0"/>
+                <a:cs typeface="Helvetica" panose="020B0604020202020204" pitchFamily="34" charset="0"/>
+              </a:rPr>
+              <a:t>depletion</a:t>
+            </a:r>
+            <a:endParaRPr lang="it-IT" dirty="0">
+              <a:solidFill>
+                <a:schemeClr val="tx1"/>
+              </a:solidFill>
+              <a:latin typeface="Helvetica" panose="020B0604020202020204" pitchFamily="34" charset="0"/>
+              <a:cs typeface="Helvetica" panose="020B0604020202020204" pitchFamily="34" charset="0"/>
+            </a:endParaRPr>
+          </a:p>
+        </p:txBody>
+      </p:sp>
+      <p:sp>
+        <p:nvSpPr>
+          <p:cNvPr id="8" name="Fumetto: rettangolo 7">
+            <a:extLst>
+              <a:ext uri="{FF2B5EF4-FFF2-40B4-BE49-F238E27FC236}">
+                <a16:creationId xmlns:a16="http://schemas.microsoft.com/office/drawing/2014/main" id="{6AD0DAEA-3142-4130-8466-1A19C3253C31}"/>
+              </a:ext>
+            </a:extLst>
+          </p:cNvPr>
+          <p:cNvSpPr/>
+          <p:nvPr/>
+        </p:nvSpPr>
+        <p:spPr>
+          <a:xfrm>
+            <a:off x="2710577" y="4431579"/>
+            <a:ext cx="1647788" cy="1157974"/>
+          </a:xfrm>
+          <a:prstGeom prst="wedgeRectCallout">
+            <a:avLst>
+              <a:gd name="adj1" fmla="val 30945"/>
+              <a:gd name="adj2" fmla="val -71176"/>
+            </a:avLst>
+          </a:prstGeom>
+          <a:solidFill>
+            <a:srgbClr val="FFC000"/>
+          </a:solidFill>
+          <a:ln w="9525">
+            <a:solidFill>
+              <a:schemeClr val="tx1"/>
+            </a:solidFill>
+          </a:ln>
+        </p:spPr>
+        <p:style>
+          <a:lnRef idx="2">
+            <a:schemeClr val="accent1">
+              <a:shade val="50000"/>
+            </a:schemeClr>
+          </a:lnRef>
+          <a:fillRef idx="1">
+            <a:schemeClr val="accent1"/>
+          </a:fillRef>
+          <a:effectRef idx="0">
+            <a:schemeClr val="accent1"/>
+          </a:effectRef>
+          <a:fontRef idx="minor">
+            <a:schemeClr val="lt1"/>
+          </a:fontRef>
+        </p:style>
+        <p:txBody>
+          <a:bodyPr rtlCol="0" anchor="ctr"/>
+          <a:lstStyle/>
+          <a:p>
+            <a:pPr algn="ctr"/>
+            <a:r>
+              <a:rPr lang="it-IT" dirty="0">
+                <a:solidFill>
+                  <a:schemeClr val="tx1"/>
+                </a:solidFill>
+                <a:latin typeface="Helvetica" panose="020B0604020202020204" pitchFamily="34" charset="0"/>
+                <a:cs typeface="Helvetica" panose="020B0604020202020204" pitchFamily="34" charset="0"/>
+              </a:rPr>
+              <a:t>w/ </a:t>
+            </a:r>
+            <a:r>
+              <a:rPr lang="it-IT" dirty="0" err="1">
+                <a:solidFill>
+                  <a:schemeClr val="tx1"/>
+                </a:solidFill>
+                <a:latin typeface="Helvetica" panose="020B0604020202020204" pitchFamily="34" charset="0"/>
+                <a:cs typeface="Helvetica" panose="020B0604020202020204" pitchFamily="34" charset="0"/>
+              </a:rPr>
+              <a:t>fairness-aware</a:t>
+            </a:r>
+            <a:r>
+              <a:rPr lang="it-IT" dirty="0">
+                <a:solidFill>
+                  <a:schemeClr val="tx1"/>
+                </a:solidFill>
+                <a:latin typeface="Helvetica" panose="020B0604020202020204" pitchFamily="34" charset="0"/>
+                <a:cs typeface="Helvetica" panose="020B0604020202020204" pitchFamily="34" charset="0"/>
+              </a:rPr>
+              <a:t> model</a:t>
+            </a:r>
+          </a:p>
+        </p:txBody>
+      </p:sp>
+      <p:sp>
+        <p:nvSpPr>
+          <p:cNvPr id="3" name="Fumetto: rettangolo 2">
+            <a:extLst>
+              <a:ext uri="{FF2B5EF4-FFF2-40B4-BE49-F238E27FC236}">
+                <a16:creationId xmlns:a16="http://schemas.microsoft.com/office/drawing/2014/main" id="{3D90806A-FA5D-4F2D-97AF-EBF383AFF71D}"/>
+              </a:ext>
+            </a:extLst>
+          </p:cNvPr>
+          <p:cNvSpPr/>
+          <p:nvPr/>
+        </p:nvSpPr>
+        <p:spPr>
+          <a:xfrm>
+            <a:off x="1453457" y="527078"/>
+            <a:ext cx="1433491" cy="1157974"/>
+          </a:xfrm>
+          <a:prstGeom prst="wedgeRectCallout">
+            <a:avLst>
+              <a:gd name="adj1" fmla="val 104410"/>
+              <a:gd name="adj2" fmla="val 79514"/>
+            </a:avLst>
+          </a:prstGeom>
+          <a:solidFill>
+            <a:srgbClr val="FFC000"/>
+          </a:solidFill>
+          <a:ln w="9525">
+            <a:solidFill>
+              <a:schemeClr val="tx1"/>
+            </a:solidFill>
+          </a:ln>
+        </p:spPr>
+        <p:style>
+          <a:lnRef idx="2">
+            <a:schemeClr val="accent1">
+              <a:shade val="50000"/>
+            </a:schemeClr>
+          </a:lnRef>
+          <a:fillRef idx="1">
+            <a:schemeClr val="accent1"/>
+          </a:fillRef>
+          <a:effectRef idx="0">
+            <a:schemeClr val="accent1"/>
+          </a:effectRef>
+          <a:fontRef idx="minor">
+            <a:schemeClr val="lt1"/>
+          </a:fontRef>
+        </p:style>
+        <p:txBody>
+          <a:bodyPr rtlCol="0" anchor="ctr"/>
+          <a:lstStyle/>
+          <a:p>
+            <a:pPr algn="ctr"/>
+            <a:r>
+              <a:rPr lang="it-IT" dirty="0">
+                <a:solidFill>
+                  <a:schemeClr val="tx1"/>
+                </a:solidFill>
+                <a:latin typeface="Helvetica" panose="020B0604020202020204" pitchFamily="34" charset="0"/>
+                <a:cs typeface="Helvetica" panose="020B0604020202020204" pitchFamily="34" charset="0"/>
+              </a:rPr>
+              <a:t>User prompt / task</a:t>
+            </a:r>
+          </a:p>
+        </p:txBody>
+      </p:sp>
+      <p:sp>
+        <p:nvSpPr>
+          <p:cNvPr id="6" name="Fumetto: rettangolo 5">
+            <a:extLst>
+              <a:ext uri="{FF2B5EF4-FFF2-40B4-BE49-F238E27FC236}">
+                <a16:creationId xmlns:a16="http://schemas.microsoft.com/office/drawing/2014/main" id="{B4DE6A3E-B4F6-49D9-9EBB-3F3E16F5938D}"/>
+              </a:ext>
+            </a:extLst>
+          </p:cNvPr>
+          <p:cNvSpPr/>
+          <p:nvPr/>
+        </p:nvSpPr>
+        <p:spPr>
+          <a:xfrm>
+            <a:off x="4956000" y="4431579"/>
+            <a:ext cx="1647788" cy="1157974"/>
+          </a:xfrm>
+          <a:prstGeom prst="wedgeRectCallout">
+            <a:avLst>
+              <a:gd name="adj1" fmla="val 43788"/>
+              <a:gd name="adj2" fmla="val -70831"/>
+            </a:avLst>
+          </a:prstGeom>
+          <a:solidFill>
+            <a:srgbClr val="FFC000"/>
+          </a:solidFill>
+          <a:ln w="9525">
+            <a:solidFill>
+              <a:schemeClr val="tx1"/>
+            </a:solidFill>
+          </a:ln>
+        </p:spPr>
+        <p:style>
+          <a:lnRef idx="2">
+            <a:schemeClr val="accent1">
+              <a:shade val="50000"/>
+            </a:schemeClr>
+          </a:lnRef>
+          <a:fillRef idx="1">
+            <a:schemeClr val="accent1"/>
+          </a:fillRef>
+          <a:effectRef idx="0">
+            <a:schemeClr val="accent1"/>
+          </a:effectRef>
+          <a:fontRef idx="minor">
+            <a:schemeClr val="lt1"/>
+          </a:fontRef>
+        </p:style>
+        <p:txBody>
+          <a:bodyPr rtlCol="0" anchor="ctr"/>
+          <a:lstStyle/>
+          <a:p>
+            <a:pPr algn="ctr"/>
+            <a:r>
+              <a:rPr lang="it-IT" dirty="0">
+                <a:solidFill>
+                  <a:schemeClr val="tx1"/>
+                </a:solidFill>
+                <a:latin typeface="Helvetica" panose="020B0604020202020204" pitchFamily="34" charset="0"/>
+                <a:cs typeface="Helvetica" panose="020B0604020202020204" pitchFamily="34" charset="0"/>
+              </a:rPr>
+              <a:t>w/ data</a:t>
+            </a:r>
+          </a:p>
+          <a:p>
+            <a:pPr algn="ctr"/>
+            <a:r>
+              <a:rPr lang="it-IT" dirty="0" err="1">
+                <a:solidFill>
+                  <a:schemeClr val="tx1"/>
+                </a:solidFill>
+                <a:latin typeface="Helvetica" panose="020B0604020202020204" pitchFamily="34" charset="0"/>
+                <a:cs typeface="Helvetica" panose="020B0604020202020204" pitchFamily="34" charset="0"/>
+              </a:rPr>
+              <a:t>augmentation</a:t>
+            </a:r>
+            <a:endParaRPr lang="it-IT" dirty="0">
+              <a:solidFill>
+                <a:schemeClr val="tx1"/>
+              </a:solidFill>
+              <a:latin typeface="Helvetica" panose="020B0604020202020204" pitchFamily="34" charset="0"/>
+              <a:cs typeface="Helvetica" panose="020B0604020202020204" pitchFamily="34" charset="0"/>
+            </a:endParaRPr>
+          </a:p>
+        </p:txBody>
+      </p:sp>
+    </p:spTree>
+    <p:extLst>
+      <p:ext uri="{BB962C8B-B14F-4D97-AF65-F5344CB8AC3E}">
+        <p14:creationId xmlns:p14="http://schemas.microsoft.com/office/powerpoint/2010/main" val="2217586932"/>
+      </p:ext>
+    </p:extLst>
+  </p:cSld>
+  <p:clrMapOvr>
+    <a:masterClrMapping/>
+  </p:clrMapOvr>
+</p:sld>
+</file>
+
+<file path=ppt/slides/slide6.xml><?xml version="1.0" encoding="utf-8"?>
+<p:sld xmlns:a="http://schemas.openxmlformats.org/drawingml/2006/main" xmlns:r="http://schemas.openxmlformats.org/officeDocument/2006/relationships" xmlns:p="http://schemas.openxmlformats.org/presentationml/2006/main">
+  <p:cSld>
+    <p:spTree>
+      <p:nvGrpSpPr>
+        <p:cNvPr id="1" name=""/>
+        <p:cNvGrpSpPr/>
+        <p:nvPr/>
+      </p:nvGrpSpPr>
+      <p:grpSpPr>
+        <a:xfrm>
+          <a:off x="0" y="0"/>
+          <a:ext cx="0" cy="0"/>
+          <a:chOff x="0" y="0"/>
+          <a:chExt cx="0" cy="0"/>
+        </a:xfrm>
+      </p:grpSpPr>
+      <p:pic>
+        <p:nvPicPr>
+          <p:cNvPr id="7" name="Immagine 6">
+            <a:extLst>
+              <a:ext uri="{FF2B5EF4-FFF2-40B4-BE49-F238E27FC236}">
+                <a16:creationId xmlns:a16="http://schemas.microsoft.com/office/drawing/2014/main" id="{812E9739-BCC1-488D-9590-DA63614AA4B0}"/>
+              </a:ext>
+            </a:extLst>
+          </p:cNvPr>
+          <p:cNvPicPr>
+            <a:picLocks noChangeAspect="1"/>
+          </p:cNvPicPr>
+          <p:nvPr/>
+        </p:nvPicPr>
+        <p:blipFill>
+          <a:blip r:embed="rId2">
+            <a:extLst>
+              <a:ext uri="{28A0092B-C50C-407E-A947-70E740481C1C}">
+                <a14:useLocalDpi xmlns:a14="http://schemas.microsoft.com/office/drawing/2010/main" val="0"/>
+              </a:ext>
+            </a:extLst>
+          </a:blip>
+          <a:stretch>
+            <a:fillRect/>
+          </a:stretch>
+        </p:blipFill>
+        <p:spPr>
+          <a:xfrm>
+            <a:off x="1605851" y="-35937"/>
+            <a:ext cx="8980297" cy="6858000"/>
+          </a:xfrm>
+          <a:prstGeom prst="rect">
+            <a:avLst/>
+          </a:prstGeom>
+        </p:spPr>
+      </p:pic>
+      <p:sp>
+        <p:nvSpPr>
+          <p:cNvPr id="4" name="Rettangolo 3">
+            <a:extLst>
+              <a:ext uri="{FF2B5EF4-FFF2-40B4-BE49-F238E27FC236}">
+                <a16:creationId xmlns:a16="http://schemas.microsoft.com/office/drawing/2014/main" id="{7504AD29-4A2A-41CC-89EC-38534DD92767}"/>
+              </a:ext>
+            </a:extLst>
+          </p:cNvPr>
+          <p:cNvSpPr/>
+          <p:nvPr/>
+        </p:nvSpPr>
+        <p:spPr>
+          <a:xfrm>
+            <a:off x="1447476" y="487147"/>
+            <a:ext cx="1734956" cy="1360287"/>
+          </a:xfrm>
+          <a:prstGeom prst="rect">
+            <a:avLst/>
+          </a:prstGeom>
+          <a:solidFill>
+            <a:schemeClr val="bg1"/>
+          </a:solidFill>
+          <a:ln>
+            <a:solidFill>
+              <a:schemeClr val="bg1"/>
+            </a:solidFill>
+          </a:ln>
+        </p:spPr>
+        <p:style>
+          <a:lnRef idx="2">
+            <a:schemeClr val="accent1">
+              <a:shade val="50000"/>
+            </a:schemeClr>
+          </a:lnRef>
+          <a:fillRef idx="1">
+            <a:schemeClr val="accent1"/>
+          </a:fillRef>
+          <a:effectRef idx="0">
+            <a:schemeClr val="accent1"/>
+          </a:effectRef>
+          <a:fontRef idx="minor">
+            <a:schemeClr val="lt1"/>
+          </a:fontRef>
+        </p:style>
+        <p:txBody>
+          <a:bodyPr rtlCol="0" anchor="ctr"/>
+          <a:lstStyle/>
+          <a:p>
+            <a:pPr algn="ctr"/>
+            <a:endParaRPr lang="it-IT"/>
+          </a:p>
+        </p:txBody>
+      </p:sp>
+      <p:sp>
+        <p:nvSpPr>
+          <p:cNvPr id="9" name="Rettangolo 8">
+            <a:extLst>
+              <a:ext uri="{FF2B5EF4-FFF2-40B4-BE49-F238E27FC236}">
+                <a16:creationId xmlns:a16="http://schemas.microsoft.com/office/drawing/2014/main" id="{310126B8-34B3-4467-ACC3-4865F7C61DB2}"/>
+              </a:ext>
+            </a:extLst>
+          </p:cNvPr>
+          <p:cNvSpPr/>
+          <p:nvPr/>
+        </p:nvSpPr>
+        <p:spPr>
+          <a:xfrm>
+            <a:off x="1453456" y="1817487"/>
+            <a:ext cx="2120291" cy="1113386"/>
+          </a:xfrm>
+          <a:prstGeom prst="rect">
+            <a:avLst/>
+          </a:prstGeom>
+          <a:solidFill>
+            <a:schemeClr val="bg1"/>
+          </a:solidFill>
+          <a:ln>
+            <a:solidFill>
+              <a:schemeClr val="bg1"/>
+            </a:solidFill>
+          </a:ln>
+        </p:spPr>
+        <p:style>
+          <a:lnRef idx="2">
+            <a:schemeClr val="accent1">
+              <a:shade val="50000"/>
+            </a:schemeClr>
+          </a:lnRef>
+          <a:fillRef idx="1">
+            <a:schemeClr val="accent1"/>
+          </a:fillRef>
+          <a:effectRef idx="0">
+            <a:schemeClr val="accent1"/>
+          </a:effectRef>
+          <a:fontRef idx="minor">
+            <a:schemeClr val="lt1"/>
+          </a:fontRef>
+        </p:style>
+        <p:txBody>
+          <a:bodyPr rtlCol="0" anchor="ctr"/>
+          <a:lstStyle/>
+          <a:p>
+            <a:pPr algn="ctr"/>
+            <a:endParaRPr lang="it-IT"/>
+          </a:p>
+        </p:txBody>
+      </p:sp>
+      <p:sp>
+        <p:nvSpPr>
+          <p:cNvPr id="8" name="Fumetto: rettangolo 7">
+            <a:extLst>
+              <a:ext uri="{FF2B5EF4-FFF2-40B4-BE49-F238E27FC236}">
+                <a16:creationId xmlns:a16="http://schemas.microsoft.com/office/drawing/2014/main" id="{6AD0DAEA-3142-4130-8466-1A19C3253C31}"/>
+              </a:ext>
+            </a:extLst>
+          </p:cNvPr>
+          <p:cNvSpPr/>
+          <p:nvPr/>
+        </p:nvSpPr>
+        <p:spPr>
+          <a:xfrm>
+            <a:off x="2710577" y="4431579"/>
+            <a:ext cx="1647788" cy="1157974"/>
+          </a:xfrm>
+          <a:prstGeom prst="wedgeRectCallout">
+            <a:avLst>
+              <a:gd name="adj1" fmla="val 30945"/>
+              <a:gd name="adj2" fmla="val -71176"/>
+            </a:avLst>
+          </a:prstGeom>
+          <a:solidFill>
+            <a:srgbClr val="FFC000"/>
+          </a:solidFill>
+          <a:ln w="9525">
+            <a:solidFill>
+              <a:schemeClr val="tx1"/>
+            </a:solidFill>
+          </a:ln>
+        </p:spPr>
+        <p:style>
+          <a:lnRef idx="2">
+            <a:schemeClr val="accent1">
+              <a:shade val="50000"/>
+            </a:schemeClr>
+          </a:lnRef>
+          <a:fillRef idx="1">
+            <a:schemeClr val="accent1"/>
+          </a:fillRef>
+          <a:effectRef idx="0">
+            <a:schemeClr val="accent1"/>
+          </a:effectRef>
+          <a:fontRef idx="minor">
+            <a:schemeClr val="lt1"/>
+          </a:fontRef>
+        </p:style>
+        <p:txBody>
+          <a:bodyPr rtlCol="0" anchor="ctr"/>
+          <a:lstStyle/>
+          <a:p>
+            <a:pPr algn="ctr"/>
+            <a:r>
+              <a:rPr lang="it-IT" dirty="0">
+                <a:solidFill>
+                  <a:schemeClr val="tx1"/>
+                </a:solidFill>
+                <a:latin typeface="Helvetica" panose="020B0604020202020204" pitchFamily="34" charset="0"/>
+                <a:cs typeface="Helvetica" panose="020B0604020202020204" pitchFamily="34" charset="0"/>
+              </a:rPr>
+              <a:t>w/ </a:t>
+            </a:r>
+            <a:r>
+              <a:rPr lang="it-IT" dirty="0" err="1">
+                <a:solidFill>
+                  <a:schemeClr val="tx1"/>
+                </a:solidFill>
+                <a:latin typeface="Helvetica" panose="020B0604020202020204" pitchFamily="34" charset="0"/>
+                <a:cs typeface="Helvetica" panose="020B0604020202020204" pitchFamily="34" charset="0"/>
+              </a:rPr>
+              <a:t>fairness-aware</a:t>
+            </a:r>
+            <a:r>
+              <a:rPr lang="it-IT" dirty="0">
+                <a:solidFill>
+                  <a:schemeClr val="tx1"/>
+                </a:solidFill>
+                <a:latin typeface="Helvetica" panose="020B0604020202020204" pitchFamily="34" charset="0"/>
+                <a:cs typeface="Helvetica" panose="020B0604020202020204" pitchFamily="34" charset="0"/>
+              </a:rPr>
+              <a:t> model</a:t>
+            </a:r>
+          </a:p>
+        </p:txBody>
+      </p:sp>
+      <p:sp>
+        <p:nvSpPr>
+          <p:cNvPr id="3" name="Fumetto: rettangolo 2">
+            <a:extLst>
+              <a:ext uri="{FF2B5EF4-FFF2-40B4-BE49-F238E27FC236}">
+                <a16:creationId xmlns:a16="http://schemas.microsoft.com/office/drawing/2014/main" id="{3D90806A-FA5D-4F2D-97AF-EBF383AFF71D}"/>
+              </a:ext>
+            </a:extLst>
+          </p:cNvPr>
+          <p:cNvSpPr/>
+          <p:nvPr/>
+        </p:nvSpPr>
+        <p:spPr>
+          <a:xfrm>
+            <a:off x="1453457" y="527078"/>
+            <a:ext cx="1433491" cy="1157974"/>
+          </a:xfrm>
+          <a:prstGeom prst="wedgeRectCallout">
+            <a:avLst>
+              <a:gd name="adj1" fmla="val 104410"/>
+              <a:gd name="adj2" fmla="val 79514"/>
+            </a:avLst>
+          </a:prstGeom>
+          <a:solidFill>
+            <a:srgbClr val="FFC000"/>
+          </a:solidFill>
+          <a:ln w="9525">
+            <a:solidFill>
+              <a:schemeClr val="tx1"/>
+            </a:solidFill>
+          </a:ln>
+        </p:spPr>
+        <p:style>
+          <a:lnRef idx="2">
+            <a:schemeClr val="accent1">
+              <a:shade val="50000"/>
+            </a:schemeClr>
+          </a:lnRef>
+          <a:fillRef idx="1">
+            <a:schemeClr val="accent1"/>
+          </a:fillRef>
+          <a:effectRef idx="0">
+            <a:schemeClr val="accent1"/>
+          </a:effectRef>
+          <a:fontRef idx="minor">
+            <a:schemeClr val="lt1"/>
+          </a:fontRef>
+        </p:style>
+        <p:txBody>
+          <a:bodyPr rtlCol="0" anchor="ctr"/>
+          <a:lstStyle/>
+          <a:p>
+            <a:pPr algn="ctr"/>
+            <a:r>
+              <a:rPr lang="it-IT" dirty="0">
+                <a:solidFill>
+                  <a:schemeClr val="tx1"/>
+                </a:solidFill>
+                <a:latin typeface="Helvetica" panose="020B0604020202020204" pitchFamily="34" charset="0"/>
+                <a:cs typeface="Helvetica" panose="020B0604020202020204" pitchFamily="34" charset="0"/>
+              </a:rPr>
+              <a:t>User task / prompt</a:t>
+            </a:r>
+          </a:p>
+        </p:txBody>
+      </p:sp>
+      <p:sp>
+        <p:nvSpPr>
+          <p:cNvPr id="6" name="Fumetto: rettangolo 5">
+            <a:extLst>
+              <a:ext uri="{FF2B5EF4-FFF2-40B4-BE49-F238E27FC236}">
+                <a16:creationId xmlns:a16="http://schemas.microsoft.com/office/drawing/2014/main" id="{B4DE6A3E-B4F6-49D9-9EBB-3F3E16F5938D}"/>
+              </a:ext>
+            </a:extLst>
+          </p:cNvPr>
+          <p:cNvSpPr/>
+          <p:nvPr/>
+        </p:nvSpPr>
+        <p:spPr>
+          <a:xfrm>
+            <a:off x="4956000" y="4431579"/>
+            <a:ext cx="1647788" cy="1157974"/>
+          </a:xfrm>
+          <a:prstGeom prst="wedgeRectCallout">
+            <a:avLst>
+              <a:gd name="adj1" fmla="val 43788"/>
+              <a:gd name="adj2" fmla="val -70831"/>
+            </a:avLst>
+          </a:prstGeom>
+          <a:solidFill>
+            <a:srgbClr val="FFC000"/>
+          </a:solidFill>
+          <a:ln w="9525">
+            <a:solidFill>
+              <a:schemeClr val="tx1"/>
+            </a:solidFill>
+          </a:ln>
+        </p:spPr>
+        <p:style>
+          <a:lnRef idx="2">
+            <a:schemeClr val="accent1">
+              <a:shade val="50000"/>
+            </a:schemeClr>
+          </a:lnRef>
+          <a:fillRef idx="1">
+            <a:schemeClr val="accent1"/>
+          </a:fillRef>
+          <a:effectRef idx="0">
+            <a:schemeClr val="accent1"/>
+          </a:effectRef>
+          <a:fontRef idx="minor">
+            <a:schemeClr val="lt1"/>
+          </a:fontRef>
+        </p:style>
+        <p:txBody>
+          <a:bodyPr rtlCol="0" anchor="ctr"/>
+          <a:lstStyle/>
+          <a:p>
+            <a:pPr algn="ctr"/>
+            <a:r>
+              <a:rPr lang="it-IT" dirty="0">
+                <a:solidFill>
+                  <a:schemeClr val="tx1"/>
+                </a:solidFill>
+                <a:latin typeface="Helvetica" panose="020B0604020202020204" pitchFamily="34" charset="0"/>
+                <a:cs typeface="Helvetica" panose="020B0604020202020204" pitchFamily="34" charset="0"/>
+              </a:rPr>
+              <a:t>w/ data</a:t>
+            </a:r>
+          </a:p>
+          <a:p>
+            <a:pPr algn="ctr"/>
+            <a:r>
+              <a:rPr lang="it-IT" dirty="0" err="1">
+                <a:solidFill>
+                  <a:schemeClr val="tx1"/>
+                </a:solidFill>
+                <a:latin typeface="Helvetica" panose="020B0604020202020204" pitchFamily="34" charset="0"/>
+                <a:cs typeface="Helvetica" panose="020B0604020202020204" pitchFamily="34" charset="0"/>
+              </a:rPr>
+              <a:t>augmentation</a:t>
+            </a:r>
+            <a:endParaRPr lang="it-IT" dirty="0">
+              <a:solidFill>
+                <a:schemeClr val="tx1"/>
+              </a:solidFill>
+              <a:latin typeface="Helvetica" panose="020B0604020202020204" pitchFamily="34" charset="0"/>
+              <a:cs typeface="Helvetica" panose="020B0604020202020204" pitchFamily="34" charset="0"/>
+            </a:endParaRPr>
+          </a:p>
+        </p:txBody>
+      </p:sp>
+      <p:sp>
+        <p:nvSpPr>
+          <p:cNvPr id="10" name="Rettangolo 9">
+            <a:extLst>
+              <a:ext uri="{FF2B5EF4-FFF2-40B4-BE49-F238E27FC236}">
+                <a16:creationId xmlns:a16="http://schemas.microsoft.com/office/drawing/2014/main" id="{27275AA8-F922-4B5D-9219-65F37D4F8A98}"/>
+              </a:ext>
+            </a:extLst>
+          </p:cNvPr>
+          <p:cNvSpPr/>
+          <p:nvPr/>
+        </p:nvSpPr>
+        <p:spPr>
+          <a:xfrm>
+            <a:off x="1453456" y="2531570"/>
+            <a:ext cx="9132692" cy="4290493"/>
+          </a:xfrm>
+          <a:prstGeom prst="rect">
+            <a:avLst/>
+          </a:prstGeom>
+          <a:solidFill>
+            <a:schemeClr val="bg1"/>
+          </a:solidFill>
+          <a:ln>
+            <a:solidFill>
+              <a:schemeClr val="bg1"/>
+            </a:solidFill>
+          </a:ln>
+        </p:spPr>
+        <p:style>
+          <a:lnRef idx="2">
+            <a:schemeClr val="accent1">
+              <a:shade val="50000"/>
+            </a:schemeClr>
+          </a:lnRef>
+          <a:fillRef idx="1">
+            <a:schemeClr val="accent1"/>
+          </a:fillRef>
+          <a:effectRef idx="0">
+            <a:schemeClr val="accent1"/>
+          </a:effectRef>
+          <a:fontRef idx="minor">
+            <a:schemeClr val="lt1"/>
+          </a:fontRef>
+        </p:style>
+        <p:txBody>
+          <a:bodyPr rtlCol="0" anchor="ctr"/>
+          <a:lstStyle/>
+          <a:p>
+            <a:pPr algn="ctr"/>
+            <a:endParaRPr lang="it-IT"/>
+          </a:p>
+        </p:txBody>
+      </p:sp>
+      <p:sp>
+        <p:nvSpPr>
+          <p:cNvPr id="11" name="Rettangolo 10">
+            <a:extLst>
+              <a:ext uri="{FF2B5EF4-FFF2-40B4-BE49-F238E27FC236}">
+                <a16:creationId xmlns:a16="http://schemas.microsoft.com/office/drawing/2014/main" id="{48698C0D-9C2C-4193-B43B-EB7A017D76A9}"/>
+              </a:ext>
+            </a:extLst>
+          </p:cNvPr>
+          <p:cNvSpPr/>
+          <p:nvPr/>
+        </p:nvSpPr>
+        <p:spPr>
+          <a:xfrm>
+            <a:off x="5779894" y="1624990"/>
+            <a:ext cx="3064630" cy="1113386"/>
+          </a:xfrm>
+          <a:prstGeom prst="rect">
+            <a:avLst/>
+          </a:prstGeom>
+          <a:solidFill>
+            <a:schemeClr val="bg1"/>
+          </a:solidFill>
+          <a:ln>
+            <a:solidFill>
+              <a:schemeClr val="bg1"/>
+            </a:solidFill>
+          </a:ln>
+        </p:spPr>
+        <p:style>
+          <a:lnRef idx="2">
+            <a:schemeClr val="accent1">
+              <a:shade val="50000"/>
+            </a:schemeClr>
+          </a:lnRef>
+          <a:fillRef idx="1">
+            <a:schemeClr val="accent1"/>
+          </a:fillRef>
+          <a:effectRef idx="0">
+            <a:schemeClr val="accent1"/>
+          </a:effectRef>
+          <a:fontRef idx="minor">
+            <a:schemeClr val="lt1"/>
+          </a:fontRef>
+        </p:style>
+        <p:txBody>
+          <a:bodyPr rtlCol="0" anchor="ctr"/>
+          <a:lstStyle/>
+          <a:p>
+            <a:pPr algn="ctr"/>
+            <a:endParaRPr lang="it-IT"/>
+          </a:p>
+        </p:txBody>
+      </p:sp>
+    </p:spTree>
+    <p:extLst>
+      <p:ext uri="{BB962C8B-B14F-4D97-AF65-F5344CB8AC3E}">
+        <p14:creationId xmlns:p14="http://schemas.microsoft.com/office/powerpoint/2010/main" val="63315076"/>
+      </p:ext>
+    </p:extLst>
+  </p:cSld>
+  <p:clrMapOvr>
+    <a:masterClrMapping/>
+  </p:clrMapOvr>
+</p:sld>
+</file>
+
+<file path=ppt/slides/slide7.xml><?xml version="1.0" encoding="utf-8"?>
+<p:sld xmlns:a="http://schemas.openxmlformats.org/drawingml/2006/main" xmlns:r="http://schemas.openxmlformats.org/officeDocument/2006/relationships" xmlns:p="http://schemas.openxmlformats.org/presentationml/2006/main">
+  <p:cSld>
+    <p:spTree>
+      <p:nvGrpSpPr>
+        <p:cNvPr id="1" name=""/>
+        <p:cNvGrpSpPr/>
+        <p:nvPr/>
+      </p:nvGrpSpPr>
+      <p:grpSpPr>
+        <a:xfrm>
+          <a:off x="0" y="0"/>
+          <a:ext cx="0" cy="0"/>
+          <a:chOff x="0" y="0"/>
+          <a:chExt cx="0" cy="0"/>
+        </a:xfrm>
+      </p:grpSpPr>
+      <p:pic>
+        <p:nvPicPr>
+          <p:cNvPr id="7" name="Immagine 6">
+            <a:extLst>
+              <a:ext uri="{FF2B5EF4-FFF2-40B4-BE49-F238E27FC236}">
+                <a16:creationId xmlns:a16="http://schemas.microsoft.com/office/drawing/2014/main" id="{812E9739-BCC1-488D-9590-DA63614AA4B0}"/>
+              </a:ext>
+            </a:extLst>
+          </p:cNvPr>
+          <p:cNvPicPr>
+            <a:picLocks noChangeAspect="1"/>
+          </p:cNvPicPr>
+          <p:nvPr/>
+        </p:nvPicPr>
+        <p:blipFill>
+          <a:blip r:embed="rId2">
+            <a:extLst>
+              <a:ext uri="{28A0092B-C50C-407E-A947-70E740481C1C}">
+                <a14:useLocalDpi xmlns:a14="http://schemas.microsoft.com/office/drawing/2010/main" val="0"/>
+              </a:ext>
+            </a:extLst>
+          </a:blip>
+          <a:stretch>
+            <a:fillRect/>
+          </a:stretch>
+        </p:blipFill>
+        <p:spPr>
+          <a:xfrm>
+            <a:off x="1605851" y="-35937"/>
+            <a:ext cx="8980297" cy="6858000"/>
+          </a:xfrm>
+          <a:prstGeom prst="rect">
+            <a:avLst/>
+          </a:prstGeom>
+        </p:spPr>
+      </p:pic>
+      <p:sp>
+        <p:nvSpPr>
+          <p:cNvPr id="4" name="Rettangolo 3">
+            <a:extLst>
+              <a:ext uri="{FF2B5EF4-FFF2-40B4-BE49-F238E27FC236}">
+                <a16:creationId xmlns:a16="http://schemas.microsoft.com/office/drawing/2014/main" id="{7504AD29-4A2A-41CC-89EC-38534DD92767}"/>
+              </a:ext>
+            </a:extLst>
+          </p:cNvPr>
+          <p:cNvSpPr/>
+          <p:nvPr/>
+        </p:nvSpPr>
+        <p:spPr>
+          <a:xfrm>
+            <a:off x="1447476" y="487147"/>
+            <a:ext cx="1734956" cy="1360287"/>
+          </a:xfrm>
+          <a:prstGeom prst="rect">
+            <a:avLst/>
+          </a:prstGeom>
+          <a:solidFill>
+            <a:schemeClr val="bg1"/>
+          </a:solidFill>
+          <a:ln>
+            <a:solidFill>
+              <a:schemeClr val="bg1"/>
+            </a:solidFill>
+          </a:ln>
+        </p:spPr>
+        <p:style>
+          <a:lnRef idx="2">
+            <a:schemeClr val="accent1">
+              <a:shade val="50000"/>
+            </a:schemeClr>
+          </a:lnRef>
+          <a:fillRef idx="1">
+            <a:schemeClr val="accent1"/>
+          </a:fillRef>
+          <a:effectRef idx="0">
+            <a:schemeClr val="accent1"/>
+          </a:effectRef>
+          <a:fontRef idx="minor">
+            <a:schemeClr val="lt1"/>
+          </a:fontRef>
+        </p:style>
+        <p:txBody>
+          <a:bodyPr rtlCol="0" anchor="ctr"/>
+          <a:lstStyle/>
+          <a:p>
+            <a:pPr algn="ctr"/>
+            <a:endParaRPr lang="it-IT"/>
+          </a:p>
+        </p:txBody>
+      </p:sp>
+      <p:sp>
+        <p:nvSpPr>
+          <p:cNvPr id="10" name="Rettangolo 9">
+            <a:extLst>
+              <a:ext uri="{FF2B5EF4-FFF2-40B4-BE49-F238E27FC236}">
+                <a16:creationId xmlns:a16="http://schemas.microsoft.com/office/drawing/2014/main" id="{27275AA8-F922-4B5D-9219-65F37D4F8A98}"/>
+              </a:ext>
+            </a:extLst>
+          </p:cNvPr>
+          <p:cNvSpPr/>
+          <p:nvPr/>
+        </p:nvSpPr>
+        <p:spPr>
+          <a:xfrm>
+            <a:off x="1453456" y="4364363"/>
+            <a:ext cx="9132692" cy="2457700"/>
+          </a:xfrm>
+          <a:prstGeom prst="rect">
+            <a:avLst/>
+          </a:prstGeom>
+          <a:solidFill>
+            <a:schemeClr val="bg1"/>
+          </a:solidFill>
+          <a:ln>
+            <a:solidFill>
+              <a:schemeClr val="bg1"/>
+            </a:solidFill>
+          </a:ln>
+        </p:spPr>
+        <p:style>
+          <a:lnRef idx="2">
+            <a:schemeClr val="accent1">
+              <a:shade val="50000"/>
+            </a:schemeClr>
+          </a:lnRef>
+          <a:fillRef idx="1">
+            <a:schemeClr val="accent1"/>
+          </a:fillRef>
+          <a:effectRef idx="0">
+            <a:schemeClr val="accent1"/>
+          </a:effectRef>
+          <a:fontRef idx="minor">
+            <a:schemeClr val="lt1"/>
+          </a:fontRef>
+        </p:style>
+        <p:txBody>
+          <a:bodyPr rtlCol="0" anchor="ctr"/>
+          <a:lstStyle/>
+          <a:p>
+            <a:pPr algn="ctr"/>
+            <a:endParaRPr lang="it-IT"/>
+          </a:p>
+        </p:txBody>
+      </p:sp>
+      <p:sp>
+        <p:nvSpPr>
+          <p:cNvPr id="9" name="Rettangolo 8">
+            <a:extLst>
+              <a:ext uri="{FF2B5EF4-FFF2-40B4-BE49-F238E27FC236}">
+                <a16:creationId xmlns:a16="http://schemas.microsoft.com/office/drawing/2014/main" id="{310126B8-34B3-4467-ACC3-4865F7C61DB2}"/>
+              </a:ext>
+            </a:extLst>
+          </p:cNvPr>
+          <p:cNvSpPr/>
+          <p:nvPr/>
+        </p:nvSpPr>
+        <p:spPr>
+          <a:xfrm>
+            <a:off x="1453456" y="1817487"/>
+            <a:ext cx="2120291" cy="1113386"/>
+          </a:xfrm>
+          <a:prstGeom prst="rect">
+            <a:avLst/>
+          </a:prstGeom>
+          <a:solidFill>
+            <a:schemeClr val="bg1"/>
+          </a:solidFill>
+          <a:ln>
+            <a:solidFill>
+              <a:schemeClr val="bg1"/>
+            </a:solidFill>
+          </a:ln>
+        </p:spPr>
+        <p:style>
+          <a:lnRef idx="2">
+            <a:schemeClr val="accent1">
+              <a:shade val="50000"/>
+            </a:schemeClr>
+          </a:lnRef>
+          <a:fillRef idx="1">
+            <a:schemeClr val="accent1"/>
+          </a:fillRef>
+          <a:effectRef idx="0">
+            <a:schemeClr val="accent1"/>
+          </a:effectRef>
+          <a:fontRef idx="minor">
+            <a:schemeClr val="lt1"/>
+          </a:fontRef>
+        </p:style>
+        <p:txBody>
+          <a:bodyPr rtlCol="0" anchor="ctr"/>
+          <a:lstStyle/>
+          <a:p>
+            <a:pPr algn="ctr"/>
+            <a:endParaRPr lang="it-IT"/>
+          </a:p>
+        </p:txBody>
+      </p:sp>
+      <p:sp>
+        <p:nvSpPr>
+          <p:cNvPr id="8" name="Fumetto: rettangolo 7">
+            <a:extLst>
+              <a:ext uri="{FF2B5EF4-FFF2-40B4-BE49-F238E27FC236}">
+                <a16:creationId xmlns:a16="http://schemas.microsoft.com/office/drawing/2014/main" id="{6AD0DAEA-3142-4130-8466-1A19C3253C31}"/>
+              </a:ext>
+            </a:extLst>
+          </p:cNvPr>
+          <p:cNvSpPr/>
+          <p:nvPr/>
+        </p:nvSpPr>
+        <p:spPr>
+          <a:xfrm>
+            <a:off x="2710577" y="4431579"/>
+            <a:ext cx="1647788" cy="1157974"/>
+          </a:xfrm>
+          <a:prstGeom prst="wedgeRectCallout">
+            <a:avLst>
+              <a:gd name="adj1" fmla="val 30945"/>
+              <a:gd name="adj2" fmla="val -71176"/>
+            </a:avLst>
+          </a:prstGeom>
+          <a:solidFill>
+            <a:srgbClr val="FFC000"/>
+          </a:solidFill>
+          <a:ln w="9525">
+            <a:solidFill>
+              <a:schemeClr val="tx1"/>
+            </a:solidFill>
+          </a:ln>
+        </p:spPr>
+        <p:style>
+          <a:lnRef idx="2">
+            <a:schemeClr val="accent1">
+              <a:shade val="50000"/>
+            </a:schemeClr>
+          </a:lnRef>
+          <a:fillRef idx="1">
+            <a:schemeClr val="accent1"/>
+          </a:fillRef>
+          <a:effectRef idx="0">
+            <a:schemeClr val="accent1"/>
+          </a:effectRef>
+          <a:fontRef idx="minor">
+            <a:schemeClr val="lt1"/>
+          </a:fontRef>
+        </p:style>
+        <p:txBody>
+          <a:bodyPr rtlCol="0" anchor="ctr"/>
+          <a:lstStyle/>
+          <a:p>
+            <a:pPr algn="ctr"/>
+            <a:r>
+              <a:rPr lang="it-IT" dirty="0">
+                <a:solidFill>
+                  <a:schemeClr val="tx1"/>
+                </a:solidFill>
+                <a:latin typeface="Helvetica" panose="020B0604020202020204" pitchFamily="34" charset="0"/>
+                <a:cs typeface="Helvetica" panose="020B0604020202020204" pitchFamily="34" charset="0"/>
+              </a:rPr>
+              <a:t>w/ </a:t>
+            </a:r>
+            <a:r>
+              <a:rPr lang="it-IT" dirty="0" err="1">
+                <a:solidFill>
+                  <a:schemeClr val="tx1"/>
+                </a:solidFill>
+                <a:latin typeface="Helvetica" panose="020B0604020202020204" pitchFamily="34" charset="0"/>
+                <a:cs typeface="Helvetica" panose="020B0604020202020204" pitchFamily="34" charset="0"/>
+              </a:rPr>
+              <a:t>fairness-aware</a:t>
+            </a:r>
+            <a:r>
+              <a:rPr lang="it-IT" dirty="0">
+                <a:solidFill>
+                  <a:schemeClr val="tx1"/>
+                </a:solidFill>
+                <a:latin typeface="Helvetica" panose="020B0604020202020204" pitchFamily="34" charset="0"/>
+                <a:cs typeface="Helvetica" panose="020B0604020202020204" pitchFamily="34" charset="0"/>
+              </a:rPr>
+              <a:t> model</a:t>
+            </a:r>
+          </a:p>
+        </p:txBody>
+      </p:sp>
+      <p:sp>
+        <p:nvSpPr>
+          <p:cNvPr id="6" name="Fumetto: rettangolo 5">
+            <a:extLst>
+              <a:ext uri="{FF2B5EF4-FFF2-40B4-BE49-F238E27FC236}">
+                <a16:creationId xmlns:a16="http://schemas.microsoft.com/office/drawing/2014/main" id="{B4DE6A3E-B4F6-49D9-9EBB-3F3E16F5938D}"/>
+              </a:ext>
+            </a:extLst>
+          </p:cNvPr>
+          <p:cNvSpPr/>
+          <p:nvPr/>
+        </p:nvSpPr>
+        <p:spPr>
+          <a:xfrm>
+            <a:off x="4956000" y="4431579"/>
+            <a:ext cx="1647788" cy="1157974"/>
+          </a:xfrm>
+          <a:prstGeom prst="wedgeRectCallout">
+            <a:avLst>
+              <a:gd name="adj1" fmla="val 43788"/>
+              <a:gd name="adj2" fmla="val -70831"/>
+            </a:avLst>
+          </a:prstGeom>
+          <a:solidFill>
+            <a:srgbClr val="FFC000"/>
+          </a:solidFill>
+          <a:ln w="9525">
+            <a:solidFill>
+              <a:schemeClr val="tx1"/>
+            </a:solidFill>
+          </a:ln>
+        </p:spPr>
+        <p:style>
+          <a:lnRef idx="2">
+            <a:schemeClr val="accent1">
+              <a:shade val="50000"/>
+            </a:schemeClr>
+          </a:lnRef>
+          <a:fillRef idx="1">
+            <a:schemeClr val="accent1"/>
+          </a:fillRef>
+          <a:effectRef idx="0">
+            <a:schemeClr val="accent1"/>
+          </a:effectRef>
+          <a:fontRef idx="minor">
+            <a:schemeClr val="lt1"/>
+          </a:fontRef>
+        </p:style>
+        <p:txBody>
+          <a:bodyPr rtlCol="0" anchor="ctr"/>
+          <a:lstStyle/>
+          <a:p>
+            <a:pPr algn="ctr"/>
+            <a:r>
+              <a:rPr lang="it-IT" dirty="0">
+                <a:solidFill>
+                  <a:schemeClr val="tx1"/>
+                </a:solidFill>
+                <a:latin typeface="Helvetica" panose="020B0604020202020204" pitchFamily="34" charset="0"/>
+                <a:cs typeface="Helvetica" panose="020B0604020202020204" pitchFamily="34" charset="0"/>
+              </a:rPr>
+              <a:t>w/ data</a:t>
+            </a:r>
+          </a:p>
+          <a:p>
+            <a:pPr algn="ctr"/>
+            <a:r>
+              <a:rPr lang="it-IT" dirty="0" err="1">
+                <a:solidFill>
+                  <a:schemeClr val="tx1"/>
+                </a:solidFill>
+                <a:latin typeface="Helvetica" panose="020B0604020202020204" pitchFamily="34" charset="0"/>
+                <a:cs typeface="Helvetica" panose="020B0604020202020204" pitchFamily="34" charset="0"/>
+              </a:rPr>
+              <a:t>augmentation</a:t>
+            </a:r>
+            <a:endParaRPr lang="it-IT" dirty="0">
+              <a:solidFill>
+                <a:schemeClr val="tx1"/>
+              </a:solidFill>
+              <a:latin typeface="Helvetica" panose="020B0604020202020204" pitchFamily="34" charset="0"/>
+              <a:cs typeface="Helvetica" panose="020B0604020202020204" pitchFamily="34" charset="0"/>
+            </a:endParaRPr>
+          </a:p>
+        </p:txBody>
+      </p:sp>
+      <p:sp>
+        <p:nvSpPr>
+          <p:cNvPr id="3" name="Fumetto: rettangolo 2">
+            <a:extLst>
+              <a:ext uri="{FF2B5EF4-FFF2-40B4-BE49-F238E27FC236}">
+                <a16:creationId xmlns:a16="http://schemas.microsoft.com/office/drawing/2014/main" id="{3D90806A-FA5D-4F2D-97AF-EBF383AFF71D}"/>
+              </a:ext>
+            </a:extLst>
+          </p:cNvPr>
+          <p:cNvSpPr/>
+          <p:nvPr/>
+        </p:nvSpPr>
+        <p:spPr>
+          <a:xfrm>
+            <a:off x="1453457" y="527078"/>
+            <a:ext cx="1433491" cy="1157974"/>
+          </a:xfrm>
+          <a:prstGeom prst="wedgeRectCallout">
+            <a:avLst>
+              <a:gd name="adj1" fmla="val 104410"/>
+              <a:gd name="adj2" fmla="val 79514"/>
+            </a:avLst>
+          </a:prstGeom>
+          <a:solidFill>
+            <a:srgbClr val="FFC000"/>
+          </a:solidFill>
+          <a:ln w="9525">
+            <a:solidFill>
+              <a:schemeClr val="tx1"/>
+            </a:solidFill>
+          </a:ln>
+        </p:spPr>
+        <p:style>
+          <a:lnRef idx="2">
+            <a:schemeClr val="accent1">
+              <a:shade val="50000"/>
+            </a:schemeClr>
+          </a:lnRef>
+          <a:fillRef idx="1">
+            <a:schemeClr val="accent1"/>
+          </a:fillRef>
+          <a:effectRef idx="0">
+            <a:schemeClr val="accent1"/>
+          </a:effectRef>
+          <a:fontRef idx="minor">
+            <a:schemeClr val="lt1"/>
+          </a:fontRef>
+        </p:style>
+        <p:txBody>
+          <a:bodyPr rtlCol="0" anchor="ctr"/>
+          <a:lstStyle/>
+          <a:p>
+            <a:pPr algn="ctr"/>
+            <a:r>
+              <a:rPr lang="it-IT" dirty="0">
+                <a:solidFill>
+                  <a:schemeClr val="tx1"/>
+                </a:solidFill>
+                <a:latin typeface="Helvetica" panose="020B0604020202020204" pitchFamily="34" charset="0"/>
+                <a:cs typeface="Helvetica" panose="020B0604020202020204" pitchFamily="34" charset="0"/>
+              </a:rPr>
+              <a:t>User task / prompt</a:t>
+            </a:r>
+          </a:p>
+        </p:txBody>
+      </p:sp>
+      <p:sp>
+        <p:nvSpPr>
+          <p:cNvPr id="12" name="Fumetto: rettangolo 11">
+            <a:extLst>
+              <a:ext uri="{FF2B5EF4-FFF2-40B4-BE49-F238E27FC236}">
+                <a16:creationId xmlns:a16="http://schemas.microsoft.com/office/drawing/2014/main" id="{B5EF3D51-3484-4A39-ABC6-CF5EC0881C83}"/>
+              </a:ext>
+            </a:extLst>
+          </p:cNvPr>
+          <p:cNvSpPr/>
+          <p:nvPr/>
+        </p:nvSpPr>
+        <p:spPr>
+          <a:xfrm>
+            <a:off x="1447475" y="2116297"/>
+            <a:ext cx="1433491" cy="1157974"/>
+          </a:xfrm>
+          <a:prstGeom prst="wedgeRectCallout">
+            <a:avLst>
+              <a:gd name="adj1" fmla="val 22237"/>
+              <a:gd name="adj2" fmla="val 90204"/>
+            </a:avLst>
+          </a:prstGeom>
+          <a:solidFill>
+            <a:srgbClr val="FFC000"/>
+          </a:solidFill>
+          <a:ln w="9525">
+            <a:solidFill>
+              <a:schemeClr val="tx1"/>
+            </a:solidFill>
+          </a:ln>
+        </p:spPr>
+        <p:style>
+          <a:lnRef idx="2">
+            <a:schemeClr val="accent1">
+              <a:shade val="50000"/>
+            </a:schemeClr>
+          </a:lnRef>
+          <a:fillRef idx="1">
+            <a:schemeClr val="accent1"/>
+          </a:fillRef>
+          <a:effectRef idx="0">
+            <a:schemeClr val="accent1"/>
+          </a:effectRef>
+          <a:fontRef idx="minor">
+            <a:schemeClr val="lt1"/>
+          </a:fontRef>
+        </p:style>
+        <p:txBody>
+          <a:bodyPr rtlCol="0" anchor="ctr"/>
+          <a:lstStyle/>
+          <a:p>
+            <a:pPr algn="ctr"/>
+            <a:r>
+              <a:rPr lang="it-IT" dirty="0">
+                <a:solidFill>
+                  <a:schemeClr val="tx1"/>
+                </a:solidFill>
+                <a:latin typeface="Helvetica" panose="020B0604020202020204" pitchFamily="34" charset="0"/>
+                <a:cs typeface="Helvetica" panose="020B0604020202020204" pitchFamily="34" charset="0"/>
+              </a:rPr>
+              <a:t>w/ feature</a:t>
+            </a:r>
+            <a:br>
+              <a:rPr lang="it-IT" dirty="0">
+                <a:solidFill>
+                  <a:schemeClr val="tx1"/>
+                </a:solidFill>
+                <a:latin typeface="Helvetica" panose="020B0604020202020204" pitchFamily="34" charset="0"/>
+                <a:cs typeface="Helvetica" panose="020B0604020202020204" pitchFamily="34" charset="0"/>
+              </a:rPr>
+            </a:br>
+            <a:r>
+              <a:rPr lang="it-IT" dirty="0" err="1">
+                <a:solidFill>
+                  <a:schemeClr val="tx1"/>
+                </a:solidFill>
+                <a:latin typeface="Helvetica" panose="020B0604020202020204" pitchFamily="34" charset="0"/>
+                <a:cs typeface="Helvetica" panose="020B0604020202020204" pitchFamily="34" charset="0"/>
+              </a:rPr>
+              <a:t>depletion</a:t>
+            </a:r>
+            <a:endParaRPr lang="it-IT" dirty="0">
+              <a:solidFill>
+                <a:schemeClr val="tx1"/>
+              </a:solidFill>
+              <a:latin typeface="Helvetica" panose="020B0604020202020204" pitchFamily="34" charset="0"/>
+              <a:cs typeface="Helvetica" panose="020B0604020202020204" pitchFamily="34" charset="0"/>
+            </a:endParaRPr>
+          </a:p>
+        </p:txBody>
+      </p:sp>
+    </p:spTree>
+    <p:extLst>
+      <p:ext uri="{BB962C8B-B14F-4D97-AF65-F5344CB8AC3E}">
+        <p14:creationId xmlns:p14="http://schemas.microsoft.com/office/powerpoint/2010/main" val="144661580"/>
+      </p:ext>
+    </p:extLst>
+  </p:cSld>
+  <p:clrMapOvr>
+    <a:masterClrMapping/>
+  </p:clrMapOvr>
+</p:sld>
+</file>
+
+<file path=ppt/slides/slide8.xml><?xml version="1.0" encoding="utf-8"?>
+<p:sld xmlns:a="http://schemas.openxmlformats.org/drawingml/2006/main" xmlns:r="http://schemas.openxmlformats.org/officeDocument/2006/relationships" xmlns:p="http://schemas.openxmlformats.org/presentationml/2006/main">
+  <p:cSld>
+    <p:spTree>
+      <p:nvGrpSpPr>
+        <p:cNvPr id="1" name=""/>
+        <p:cNvGrpSpPr/>
+        <p:nvPr/>
+      </p:nvGrpSpPr>
+      <p:grpSpPr>
+        <a:xfrm>
+          <a:off x="0" y="0"/>
+          <a:ext cx="0" cy="0"/>
+          <a:chOff x="0" y="0"/>
+          <a:chExt cx="0" cy="0"/>
+        </a:xfrm>
+      </p:grpSpPr>
+      <p:pic>
+        <p:nvPicPr>
+          <p:cNvPr id="7" name="Immagine 6">
+            <a:extLst>
+              <a:ext uri="{FF2B5EF4-FFF2-40B4-BE49-F238E27FC236}">
+                <a16:creationId xmlns:a16="http://schemas.microsoft.com/office/drawing/2014/main" id="{812E9739-BCC1-488D-9590-DA63614AA4B0}"/>
+              </a:ext>
+            </a:extLst>
+          </p:cNvPr>
+          <p:cNvPicPr>
+            <a:picLocks noChangeAspect="1"/>
+          </p:cNvPicPr>
+          <p:nvPr/>
+        </p:nvPicPr>
+        <p:blipFill>
+          <a:blip r:embed="rId2">
+            <a:extLst>
+              <a:ext uri="{28A0092B-C50C-407E-A947-70E740481C1C}">
+                <a14:useLocalDpi xmlns:a14="http://schemas.microsoft.com/office/drawing/2010/main" val="0"/>
+              </a:ext>
+            </a:extLst>
+          </a:blip>
+          <a:stretch>
+            <a:fillRect/>
+          </a:stretch>
+        </p:blipFill>
+        <p:spPr>
+          <a:xfrm>
+            <a:off x="1605851" y="-35937"/>
+            <a:ext cx="8980297" cy="6858000"/>
+          </a:xfrm>
+          <a:prstGeom prst="rect">
+            <a:avLst/>
+          </a:prstGeom>
+        </p:spPr>
+      </p:pic>
+      <p:sp>
+        <p:nvSpPr>
+          <p:cNvPr id="4" name="Rettangolo 3">
+            <a:extLst>
+              <a:ext uri="{FF2B5EF4-FFF2-40B4-BE49-F238E27FC236}">
+                <a16:creationId xmlns:a16="http://schemas.microsoft.com/office/drawing/2014/main" id="{7504AD29-4A2A-41CC-89EC-38534DD92767}"/>
+              </a:ext>
+            </a:extLst>
+          </p:cNvPr>
+          <p:cNvSpPr/>
+          <p:nvPr/>
+        </p:nvSpPr>
+        <p:spPr>
+          <a:xfrm>
+            <a:off x="1447476" y="487147"/>
+            <a:ext cx="1734956" cy="1360287"/>
+          </a:xfrm>
+          <a:prstGeom prst="rect">
+            <a:avLst/>
+          </a:prstGeom>
+          <a:solidFill>
+            <a:schemeClr val="bg1"/>
+          </a:solidFill>
+          <a:ln>
+            <a:solidFill>
+              <a:schemeClr val="bg1"/>
+            </a:solidFill>
+          </a:ln>
+        </p:spPr>
+        <p:style>
+          <a:lnRef idx="2">
+            <a:schemeClr val="accent1">
+              <a:shade val="50000"/>
+            </a:schemeClr>
+          </a:lnRef>
+          <a:fillRef idx="1">
+            <a:schemeClr val="accent1"/>
+          </a:fillRef>
+          <a:effectRef idx="0">
+            <a:schemeClr val="accent1"/>
+          </a:effectRef>
+          <a:fontRef idx="minor">
+            <a:schemeClr val="lt1"/>
+          </a:fontRef>
+        </p:style>
+        <p:txBody>
+          <a:bodyPr rtlCol="0" anchor="ctr"/>
+          <a:lstStyle/>
+          <a:p>
+            <a:pPr algn="ctr"/>
+            <a:endParaRPr lang="it-IT"/>
+          </a:p>
+        </p:txBody>
+      </p:sp>
+      <p:sp>
+        <p:nvSpPr>
+          <p:cNvPr id="9" name="Rettangolo 8">
+            <a:extLst>
+              <a:ext uri="{FF2B5EF4-FFF2-40B4-BE49-F238E27FC236}">
+                <a16:creationId xmlns:a16="http://schemas.microsoft.com/office/drawing/2014/main" id="{310126B8-34B3-4467-ACC3-4865F7C61DB2}"/>
+              </a:ext>
+            </a:extLst>
+          </p:cNvPr>
+          <p:cNvSpPr/>
+          <p:nvPr/>
+        </p:nvSpPr>
+        <p:spPr>
+          <a:xfrm>
+            <a:off x="1453456" y="1817487"/>
+            <a:ext cx="2120291" cy="1113386"/>
+          </a:xfrm>
+          <a:prstGeom prst="rect">
+            <a:avLst/>
+          </a:prstGeom>
+          <a:solidFill>
+            <a:schemeClr val="bg1"/>
+          </a:solidFill>
+          <a:ln>
+            <a:solidFill>
+              <a:schemeClr val="bg1"/>
+            </a:solidFill>
+          </a:ln>
+        </p:spPr>
+        <p:style>
+          <a:lnRef idx="2">
+            <a:schemeClr val="accent1">
+              <a:shade val="50000"/>
+            </a:schemeClr>
+          </a:lnRef>
+          <a:fillRef idx="1">
+            <a:schemeClr val="accent1"/>
+          </a:fillRef>
+          <a:effectRef idx="0">
+            <a:schemeClr val="accent1"/>
+          </a:effectRef>
+          <a:fontRef idx="minor">
+            <a:schemeClr val="lt1"/>
+          </a:fontRef>
+        </p:style>
+        <p:txBody>
+          <a:bodyPr rtlCol="0" anchor="ctr"/>
+          <a:lstStyle/>
+          <a:p>
+            <a:pPr algn="ctr"/>
+            <a:endParaRPr lang="it-IT"/>
+          </a:p>
+        </p:txBody>
+      </p:sp>
+      <p:sp>
+        <p:nvSpPr>
+          <p:cNvPr id="8" name="Fumetto: rettangolo 7">
+            <a:extLst>
+              <a:ext uri="{FF2B5EF4-FFF2-40B4-BE49-F238E27FC236}">
+                <a16:creationId xmlns:a16="http://schemas.microsoft.com/office/drawing/2014/main" id="{6AD0DAEA-3142-4130-8466-1A19C3253C31}"/>
+              </a:ext>
+            </a:extLst>
+          </p:cNvPr>
+          <p:cNvSpPr/>
+          <p:nvPr/>
+        </p:nvSpPr>
+        <p:spPr>
+          <a:xfrm>
+            <a:off x="2710577" y="4431579"/>
+            <a:ext cx="1647788" cy="1157974"/>
+          </a:xfrm>
+          <a:prstGeom prst="wedgeRectCallout">
+            <a:avLst>
+              <a:gd name="adj1" fmla="val 30945"/>
+              <a:gd name="adj2" fmla="val -71176"/>
+            </a:avLst>
+          </a:prstGeom>
+          <a:solidFill>
+            <a:srgbClr val="FFC000"/>
+          </a:solidFill>
+          <a:ln w="9525">
+            <a:solidFill>
+              <a:schemeClr val="tx1"/>
+            </a:solidFill>
+          </a:ln>
+        </p:spPr>
+        <p:style>
+          <a:lnRef idx="2">
+            <a:schemeClr val="accent1">
+              <a:shade val="50000"/>
+            </a:schemeClr>
+          </a:lnRef>
+          <a:fillRef idx="1">
+            <a:schemeClr val="accent1"/>
+          </a:fillRef>
+          <a:effectRef idx="0">
+            <a:schemeClr val="accent1"/>
+          </a:effectRef>
+          <a:fontRef idx="minor">
+            <a:schemeClr val="lt1"/>
+          </a:fontRef>
+        </p:style>
+        <p:txBody>
+          <a:bodyPr rtlCol="0" anchor="ctr"/>
+          <a:lstStyle/>
+          <a:p>
+            <a:pPr algn="ctr"/>
+            <a:r>
+              <a:rPr lang="it-IT" dirty="0">
+                <a:solidFill>
+                  <a:schemeClr val="tx1"/>
+                </a:solidFill>
+                <a:latin typeface="Helvetica" panose="020B0604020202020204" pitchFamily="34" charset="0"/>
+                <a:cs typeface="Helvetica" panose="020B0604020202020204" pitchFamily="34" charset="0"/>
+              </a:rPr>
+              <a:t>w/ </a:t>
+            </a:r>
+            <a:r>
+              <a:rPr lang="it-IT" dirty="0" err="1">
+                <a:solidFill>
+                  <a:schemeClr val="tx1"/>
+                </a:solidFill>
+                <a:latin typeface="Helvetica" panose="020B0604020202020204" pitchFamily="34" charset="0"/>
+                <a:cs typeface="Helvetica" panose="020B0604020202020204" pitchFamily="34" charset="0"/>
+              </a:rPr>
+              <a:t>fairness-aware</a:t>
+            </a:r>
+            <a:r>
+              <a:rPr lang="it-IT" dirty="0">
+                <a:solidFill>
+                  <a:schemeClr val="tx1"/>
+                </a:solidFill>
+                <a:latin typeface="Helvetica" panose="020B0604020202020204" pitchFamily="34" charset="0"/>
+                <a:cs typeface="Helvetica" panose="020B0604020202020204" pitchFamily="34" charset="0"/>
+              </a:rPr>
+              <a:t> model</a:t>
+            </a:r>
+          </a:p>
+        </p:txBody>
+      </p:sp>
+      <p:sp>
+        <p:nvSpPr>
+          <p:cNvPr id="3" name="Fumetto: rettangolo 2">
+            <a:extLst>
+              <a:ext uri="{FF2B5EF4-FFF2-40B4-BE49-F238E27FC236}">
+                <a16:creationId xmlns:a16="http://schemas.microsoft.com/office/drawing/2014/main" id="{3D90806A-FA5D-4F2D-97AF-EBF383AFF71D}"/>
+              </a:ext>
+            </a:extLst>
+          </p:cNvPr>
+          <p:cNvSpPr/>
+          <p:nvPr/>
+        </p:nvSpPr>
+        <p:spPr>
+          <a:xfrm>
+            <a:off x="1453457" y="527078"/>
+            <a:ext cx="1433491" cy="1157974"/>
+          </a:xfrm>
+          <a:prstGeom prst="wedgeRectCallout">
+            <a:avLst>
+              <a:gd name="adj1" fmla="val 104410"/>
+              <a:gd name="adj2" fmla="val 79514"/>
+            </a:avLst>
+          </a:prstGeom>
+          <a:solidFill>
+            <a:srgbClr val="FFC000"/>
+          </a:solidFill>
+          <a:ln w="9525">
+            <a:solidFill>
+              <a:schemeClr val="tx1"/>
+            </a:solidFill>
+          </a:ln>
+        </p:spPr>
+        <p:style>
+          <a:lnRef idx="2">
+            <a:schemeClr val="accent1">
+              <a:shade val="50000"/>
+            </a:schemeClr>
+          </a:lnRef>
+          <a:fillRef idx="1">
+            <a:schemeClr val="accent1"/>
+          </a:fillRef>
+          <a:effectRef idx="0">
+            <a:schemeClr val="accent1"/>
+          </a:effectRef>
+          <a:fontRef idx="minor">
+            <a:schemeClr val="lt1"/>
+          </a:fontRef>
+        </p:style>
+        <p:txBody>
+          <a:bodyPr rtlCol="0" anchor="ctr"/>
+          <a:lstStyle/>
+          <a:p>
+            <a:pPr algn="ctr"/>
+            <a:r>
+              <a:rPr lang="it-IT" dirty="0">
+                <a:solidFill>
+                  <a:schemeClr val="tx1"/>
+                </a:solidFill>
+                <a:latin typeface="Helvetica" panose="020B0604020202020204" pitchFamily="34" charset="0"/>
+                <a:cs typeface="Helvetica" panose="020B0604020202020204" pitchFamily="34" charset="0"/>
+              </a:rPr>
+              <a:t>User task / prompt</a:t>
+            </a:r>
+          </a:p>
+        </p:txBody>
+      </p:sp>
+    </p:spTree>
+    <p:extLst>
+      <p:ext uri="{BB962C8B-B14F-4D97-AF65-F5344CB8AC3E}">
+        <p14:creationId xmlns:p14="http://schemas.microsoft.com/office/powerpoint/2010/main" val="1223333813"/>
       </p:ext>
     </p:extLst>
   </p:cSld>
